--- a/docs/slides/midterm-5min.pptx
+++ b/docs/slides/midterm-5min.pptx
@@ -508,12 +508,14 @@
           <a:p>
             <a:r>
               <a:rPr lang="en-US" dirty="0"/>
-              <a:t>Ngân sách thời gian (tổng ~300 s):
-S1 15s · S2 45s · S3 70s · S4 50s · S5 60s · S6 50s · S7 15s
-Nguyên tắc: mỗi slide 1 thông điệp; số liệu đọc từ slide, không đọc lại chữ.
-Mở đầu 15s: "Nhóm em chọn hướng nghiên cứu: tái hiện có kiểm soát một bài báo TIFS 2025,
-đo lại các con số của bài, và đề xuất một cải tiến dựa trên điểm yếu đo được."
-KHÔNG đọc tên bài báo dài — chỉ nói "bài TIFS 2025 về GTAE-IDS".</a:t>
+              <a:t>S1 · 15 s
+MỞ ĐẦU (nói khi còn ở slide này):
+"Em chào thầy/cô. Nhóm 8 làm đồ án hướng nghiên cứu: tái hiện bài GTAE-IDS trên
+IEEE TIFS 2025 — phát hiện xâm nhập chỉ bằng vài gói đầu của luồng — rồi đo lại số
+liệu của bài và đề xuất một cải tiến."
+KHÔNG đọc tên bài báo tiếng Anh trên slide (mất ~10 giây vô ích).
+Ngân sách cả bài: S1 15 · S2 45 · S3 70 · S4 50 · S5 60 · S6 50 · S7 15.
+Nguyên tắc: không đọc chữ trên slide; slide là gạch đầu dòng, miệng là nội dung.</a:t>
             </a:r>
             <a:endParaRPr lang="en-US" dirty="0"/>
           </a:p>
@@ -601,8 +603,18 @@
           <a:p>
             <a:r>
               <a:rPr lang="en-US" dirty="0"/>
-              <a:t>45s. Điểm nhấn: gap là "packet-based + unsupervised" (đúng theo bảng khảo sát của chính tác giả).
-Câu chốt cuối slide là cầu nối sang slide 4 (đóng góp của nhóm = đo lại FPR).</a:t>
+              <a:t>S2 · 45 s
+"Ba hạn chế của NIDS hiện nay. Một, học trên đặc trưng luồng nên chỉ ra quyết định sau
+khi luồng kết thúc — tức là phân tích hồi cứu, không phải phát hiện online.
+Hai, dữ liệu phẳng nên mất cấu trúc: PortScan là một nguồn quét nhiều đích, DDoS là
+nhiều nguồn dồn một đích — nhìn từng luồng riêng lẻ thì không thấy.
+Ba, phần lớn học có giám sát: cần nhãn tấn công và yếu với tấn công chưa thấy.
+Bài báo khảo sát 15 công trình GNN cho IDS: chỉ một bài là unsupervised, và bài đó vẫn
+flow-based. Vậy chưa có hệ vừa packet-based vừa unsupervised — GTAE-IDS lấp chỗ đó.
+Câu hỏi của nhóm em là: tái hiện được tới đâu, và cái giá báo động giả là bao nhiêu."
+THAO TÁC: giơ tay đếm 1–2–3 ở ba gạch đầu dòng; câu cuối hạ giọng, chậm lại.
+TRÁNH: giải thích "GNN là gì" — để Q&amp;A.
+CHUYỂN: "Vậy bài báo làm gì để lấp khoảng trống đó? Ý tưởng gồm bốn bước."</a:t>
             </a:r>
             <a:endParaRPr lang="en-US" dirty="0"/>
           </a:p>
@@ -690,9 +702,21 @@
           <a:p>
             <a:r>
               <a:rPr lang="en-US" dirty="0"/>
-              <a:t>70s — slide trọng tâm. Nói theo mạch: "luồng thành cạnh, gói thành đặc trưng cạnh 25 byte,
-học chỉ trên benign, rồi tách encoder cho 4 detector bỏ phiếu."
-Nhấn: nút KHÔNG có đặc trưng (chỉ cấu trúc); attention là giữa CÁC CẠNH (khác transformer chuẩn trên nút).</a:t>
+              <a:t>S3 · 70 s — slide trọng tâm
+"Ý tưởng gồm bốn bước. Bước một — biến lưu lượng thành đồ thị: mỗi nút là một cặp IP và
+port, nút không có đặc trưng; mỗi cạnh là một luồng TCP.
+Bước hai — đặc trưng của cạnh: lấy p gói đầu, mỗi gói bỏ Ethernet, options, payload, IP
+và port, giữ đúng 25 byte header, chia 255. Gói đi đặt vào 25 ô đầu, gói về đặt vào 25 ô
+sau, nên p gói thành 2×25×p chiều.
+Bước ba — một autoencoder kiểu graph transformer học tái tạo đặc trưng cạnh, chỉ trên lưu
+lượng bình thường. Khác biệt là attention không chạy giữa các nút mà giữa các cạnh dùng
+chung đầu mút — nên embedding của một luồng mang ngữ cảnh của các luồng xung quanh.
+Bước bốn — vứt decoder, giữ encoder, đưa embedding cho bốn bộ dò bất thường: OCSVM,
+Isolation Forest, HBOS, INNE — rồi bỏ phiếu đa số."
+THAO TÁC: nói đến đâu chỉ tay đến khối đó trên sơ đồ. Nhấn "chỉ học trên benign".
+TRÁNH: đọc dòng chú thích cuối slide (TPR 99,04% / FPR 6,56%) — nếu còn thời gian mới nói
+"p chạy từ 2 đến 8, mỗi p một model riêng".
+CHUYỂN: "Nhóm em không chỉ chạy lại, mà còn đọc lại số liệu — và tìm ra ba điểm."</a:t>
             </a:r>
             <a:endParaRPr lang="en-US" dirty="0"/>
           </a:p>
@@ -780,8 +804,19 @@
           <a:p>
             <a:r>
               <a:rPr lang="en-US" dirty="0"/>
-              <a:t>50s. Đây là phần "chất" nhất: không chỉ tái hiện mà đọc lại số liệu để tìm điểm yếu.
-Câu chốt: FPR của ensemble là chi phí vận hành thật, và paper không kiểm soát nó.</a:t>
+              <a:t>S4 · 50 s — slide "chất" nhất
+"Đây là ba điểm nhóm em phát hiện khi đọc lại số liệu của bài.
+Thứ nhất, ensemble làm FPR tăng: ở cả bảy giá trị p, FPR của ensemble là 5,9 đến 8,9
+phần trăm, trong khi mọi detector đơn chỉ 3,4 đến 5,4 phần trăm. Nghĩa là bỏ phiếu đa số
+đang thiên về báo động — và suy ngược từ số liệu thì luật phải là 'hai trên bốn phiếu',
+không phải ba trên bốn.
+Thứ hai, thí nghiệm chuyển miền sang CIC-IDS2018 và ACI-IoT chỉ chạy trên lưu lượng độc
+hại, nên không có FPR — vế báo động giả ở môi trường mới chưa hề được chứng minh.
+Thứ ba, 25 byte giữ lại TTL, checksum và seq/ack; hai checksum được tính từ chính IP và
+port đã bị xóa, nên thông tin rò rỉ gián tiếp."
+THAO TÁC: giơ ba ngón tay, mỗi ngón một điểm. Nhấn con số "8,9% so với 5,4%".
+TRÁNH: nói "bài báo sai" — nói "chưa được chứng minh", giọng bình luận, không đối đầu.
+CHUYỂN: "Ba điểm đó dẫn trực tiếp đến phần thực nghiệm và đề xuất của nhóm em."</a:t>
             </a:r>
             <a:endParaRPr lang="en-US" dirty="0"/>
           </a:p>
@@ -869,8 +904,20 @@
           <a:p>
             <a:r>
               <a:rPr lang="en-US" dirty="0"/>
-              <a:t>60s. Nói nhanh, đây là slide "cam kết phương pháp".
-Nhấn 2 điểm GVHD hay hỏi: (i) split theo thời gian chứ không random; (ii) đo FPR chứ không chỉ TPR.</a:t>
+              <a:t>S5 · 60 s
+"Về thực nghiệm. Dữ liệu là CIC-IDS2017, khoảng 51 GB pcap, nhóm em chỉ dùng TCP. Nhãn
+gói lấy từ nhãn luồng, theo bảng lịch tấn công của CIC đối chiếu với file CSV flow; luồng
+nào không khớp chắc chắn thì đánh dấu UNCERTAIN và loại ra, có đếm tỉ lệ.
+Nhóm làm p bằng 2, 4 và 8; benign cộng hai tấn công đại diện là DoS Hulk — volumetric —
+và PortScan — không volumetric. Chia tập theo luồng và theo ngày, chạy ba seed.
+Chỉ số chính là TPR và FPR; đo thêm AUROC, PR-AUC, TPR tại FPR bằng 1%, và số gói trung
+bình đến khi ra quyết định. Đối chứng ba mức: B0 đặc trưng thô không có đồ thị — đúng cột
+'không ngữ cảnh' trong bài; B1 là autoencoder MLP; B2 là E-GraphSAGE — để biết đóng góp
+thật đến từ đồ thị hay từ transformer."
+THAO TÁC: nói "theo ngày" chậm và rõ — đây là điểm giảng viên hay gật đầu.
+TRÁNH: sa vào chi tiết gán nhãn, một câu là đủ.
+CẮT NẾU TRỄ: bỏ hẳn phần B0/B1/B2, chỉ nói "có ba mức đối chứng".
+CHUYỂN: "Từ đó nhóm em đề xuất cải tiến P1."</a:t>
             </a:r>
             <a:endParaRPr lang="en-US" dirty="0"/>
           </a:p>
@@ -958,9 +1005,23 @@
           <a:p>
             <a:r>
               <a:rPr lang="en-US" dirty="0"/>
-              <a:t>50s. Mạch nói: "đề xuất không nằm ở kiến trúc mà ở tầng quyết định: hiệu chỉnh FPR và dừng sớm."
-Nếu bị hỏi "sao không đổi kiến trúc?": chi phí thấp, đo được, và nhắm đúng điểm yếu đã chứng minh từ Table VI,
-còn thay kiến trúc (P3/P4/P5) thì khó quy kết nguyên nhân và vượt thời gian.</a:t>
+              <a:t>S6 · 50 s
+"Từ đó nhóm em đề xuất P1. Thay vì bốn nhãn cứng rồi bỏ phiếu — vốn không có gì bảo đảm
+về FPR — nhóm dùng conformal p-value: dành riêng một tập benign để hiệu chỉnh, mỗi
+detector cho một điểm, quy thành p-value, báo động khi p-value nhỏ hơn alpha. Nếu tập
+hiệu chỉnh và tập test hoán đổi được cho nhau, FPR bị chặn trên bởi alpha — có bảo đảm
+về lý thuyết, không phải chọn tay.
+Kèm theo là dừng sớm: xét lần lượt p từ 2 đến 8, chia ngân sách alpha theo từng bước;
+luồng nào đủ bất thường thì báo ngay, nên mỗi luồng có một p_decision thay vì luôn chờ
+đủ 8 gói.
+Nhóm định trước tiêu chí thắng: FPR thực đo không vượt alpha cộng 1 điểm phần trăm; TPR
+tại FPR một phần trăm cao hơn bỏ phiếu đa số; và số gói đến quyết định nhỏ hơn 8.
+Lộ trình 12 tuần: M1 đã xong, M2 dữ liệu và đồ thị tuần 4, M3 train GTAE tuần 6, M4
+detector tuần 8, M5 ablation và P1 tuần 10, M6 báo cáo và demo tuần 12."
+THAO TÁC: phần lộ trình lướt tay ngang dòng chữ, đọc nhanh — đừng đọc từng chữ.
+TRÁNH: giải thích công thức conformal; nếu bị hỏi sâu, trả lời "đếm tỉ lệ mẫu benign có
+điểm bất thường cao hơn mẫu đang xét".
+CẮT NẾU TRỄ: bỏ phần lộ trình, chỉ nói "12 tuần, hiện ở milestone 2".</a:t>
             </a:r>
             <a:endParaRPr lang="en-US" dirty="0"/>
           </a:p>
@@ -1048,7 +1109,26 @@
           <a:p>
             <a:r>
               <a:rPr lang="en-US" dirty="0"/>
-              <a:t>15s. Chốt: "Xin thầy/cô cho ý kiến về 3 câu hỏi ở cột trái và về P1 có đủ tính 'cải tiến phương pháp' không."</a:t>
+              <a:t>S7 · 15 s
+"Tóm lại: nhóm em tái hiện có kiểm soát, ghi rõ mọi giả định vì bài báo không công bố hết
+siêu tham số, và P1 nhắm đúng điểm yếu đo được là FPR. Danh mục đầy đủ 24 tài liệu nằm
+trong tài liệu thiết kế của nhóm. Em xin hết phần trình bày."
+THAO TÁC: đứng thẳng, nhìn thầy/cô ở câu cuối, không nhìn slide.
+TRÁNH: "cảm ơn mọi người đã lắng nghe" — sáo rỗng, mất 5 giây.
+=== Q&amp;A — trả lời 1–2 câu, đừng diễn giải dài ===
+Hỏi: Sao gọi unsupervised khi vẫn cần benign?
+ Đáp: Đúng hơn là one-class — train không dùng nhãn tấn công, nhưng vẫn cần tập benign sạch.
+Hỏi: Bỏ IP/port mà sao vẫn dựng đồ thị bằng IP/port?
+ Đáp: IP/port để xác định ai nói với ai, không đi vào đặc trưng; nhưng cấu trúc vẫn mang
+ thông tin môi trường — đó là hạn chế nhóm em đã ghi.
+Hỏi: Sao không dùng p = 1?
+ Đáp: Gói đầu là SYN, benign và tấn công giống nhau nên vô thông tin.
+Hỏi: P1 khác gì bài gốc?
+ Đáp: Không đổi encoder; chỉ thay tầng quyết định — bỏ phiếu cứng thành p-value có hiệu
+ chỉnh, kèm dừng sớm.
+Hỏi: Kết quả nhóm có bằng paper không?
+ Đáp: Không kỳ vọng bằng — khác split, khác nhãn, và vài siêu tham số bài không công bố.
+ Mục tiêu là tái hiện xu hướng, có bảng giải thích chênh lệch.</a:t>
             </a:r>
             <a:endParaRPr lang="en-US" dirty="0"/>
           </a:p>
